--- a/MPLAD_Trace_360_Master_Deck.pptx
+++ b/MPLAD_Trace_360_Master_Deck.pptx
@@ -12,6 +12,7 @@
     <p:sldId id="260" r:id="rId11"/>
     <p:sldId id="261" r:id="rId12"/>
     <p:sldId id="262" r:id="rId13"/>
+    <p:sldId id="263" r:id="rId14"/>
   </p:sldIdLst>
   <p:sldSz cx="12191695" cy="6858000" type="screen4x3"/>
   <p:notesSz cx="6858000" cy="9144000"/>
@@ -7076,6 +7077,1062 @@
             </a:pPr>
             <a:r>
               <a:t>By shifting public works governance from post-facto audit complaints to real-time automated payment freezes, the platform prevents an estimated ₹300–500 Crores in ghost billing annually while empowering 140+ Crore citizens with transparent, verifiable development assets.</a:t>
+            </a:r>
+          </a:p>
+        </p:txBody>
+      </p:sp>
+    </p:spTree>
+  </p:cSld>
+  <p:clrMapOvr>
+    <a:masterClrMapping/>
+  </p:clrMapOvr>
+</p:sld>
+</file>
+
+<file path=ppt/slides/slide8.xml><?xml version="1.0" encoding="utf-8"?>
+<p:sld xmlns:a="http://schemas.openxmlformats.org/drawingml/2006/main" xmlns:p="http://schemas.openxmlformats.org/presentationml/2006/main" xmlns:r="http://schemas.openxmlformats.org/officeDocument/2006/relationships">
+  <p:cSld>
+    <p:spTree>
+      <p:nvGrpSpPr>
+        <p:cNvPr id="1" name=""/>
+        <p:cNvGrpSpPr/>
+        <p:nvPr/>
+      </p:nvGrpSpPr>
+      <p:grpSpPr/>
+      <p:sp>
+        <p:nvSpPr>
+          <p:cNvPr id="2" name="Rectangle 1"/>
+          <p:cNvSpPr/>
+          <p:nvPr/>
+        </p:nvSpPr>
+        <p:spPr>
+          <a:xfrm>
+            <a:off x="0" y="0"/>
+            <a:ext cx="12191695" cy="1051560"/>
+          </a:xfrm>
+          <a:prstGeom prst="rect">
+            <a:avLst/>
+          </a:prstGeom>
+          <a:solidFill>
+            <a:srgbClr val="0B2545"/>
+          </a:solidFill>
+          <a:ln>
+            <a:solidFill>
+              <a:srgbClr val="0B2545"/>
+            </a:solidFill>
+          </a:ln>
+        </p:spPr>
+        <p:style>
+          <a:lnRef idx="1">
+            <a:schemeClr val="accent1"/>
+          </a:lnRef>
+          <a:fillRef idx="3">
+            <a:schemeClr val="accent1"/>
+          </a:fillRef>
+          <a:effectRef idx="2">
+            <a:schemeClr val="accent1"/>
+          </a:effectRef>
+          <a:fontRef idx="minor">
+            <a:schemeClr val="lt1"/>
+          </a:fontRef>
+        </p:style>
+        <p:txBody>
+          <a:bodyPr rtlCol="0" anchor="ctr"/>
+          <a:lstStyle/>
+          <a:p>
+            <a:pPr algn="ctr"/>
+          </a:p>
+        </p:txBody>
+      </p:sp>
+      <p:sp>
+        <p:nvSpPr>
+          <p:cNvPr id="3" name="Rectangle 2"/>
+          <p:cNvSpPr/>
+          <p:nvPr/>
+        </p:nvSpPr>
+        <p:spPr>
+          <a:xfrm>
+            <a:off x="0" y="1051560"/>
+            <a:ext cx="12191695" cy="54864"/>
+          </a:xfrm>
+          <a:prstGeom prst="rect">
+            <a:avLst/>
+          </a:prstGeom>
+          <a:solidFill>
+            <a:srgbClr val="EA580C"/>
+          </a:solidFill>
+          <a:ln>
+            <a:solidFill>
+              <a:srgbClr val="EA580C"/>
+            </a:solidFill>
+          </a:ln>
+        </p:spPr>
+        <p:style>
+          <a:lnRef idx="1">
+            <a:schemeClr val="accent1"/>
+          </a:lnRef>
+          <a:fillRef idx="3">
+            <a:schemeClr val="accent1"/>
+          </a:fillRef>
+          <a:effectRef idx="2">
+            <a:schemeClr val="accent1"/>
+          </a:effectRef>
+          <a:fontRef idx="minor">
+            <a:schemeClr val="lt1"/>
+          </a:fontRef>
+        </p:style>
+        <p:txBody>
+          <a:bodyPr rtlCol="0" anchor="ctr"/>
+          <a:lstStyle/>
+          <a:p>
+            <a:pPr algn="ctr"/>
+          </a:p>
+        </p:txBody>
+      </p:sp>
+      <p:sp>
+        <p:nvSpPr>
+          <p:cNvPr id="4" name="TextBox 3"/>
+          <p:cNvSpPr txBox="1"/>
+          <p:nvPr/>
+        </p:nvSpPr>
+        <p:spPr>
+          <a:xfrm>
+            <a:off x="731520" y="109728"/>
+            <a:ext cx="10698480" cy="868680"/>
+          </a:xfrm>
+          <a:prstGeom prst="rect">
+            <a:avLst/>
+          </a:prstGeom>
+          <a:noFill/>
+        </p:spPr>
+        <p:txBody>
+          <a:bodyPr wrap="square">
+            <a:spAutoFit/>
+          </a:bodyPr>
+          <a:lstStyle/>
+          <a:p>
+            <a:pPr>
+              <a:defRPr sz="2000" b="1">
+                <a:solidFill>
+                  <a:srgbClr val="FFFFFF"/>
+                </a:solidFill>
+              </a:defRPr>
+            </a:pPr>
+            <a:r>
+              <a:t>7. 1-CLICK GPS ASSET REVERSE-LOOKUP &amp; CONTRACTOR DEFECT LIABILITY</a:t>
+            </a:r>
+          </a:p>
+          <a:p>
+            <a:pPr>
+              <a:defRPr sz="1100">
+                <a:solidFill>
+                  <a:srgbClr val="FED7AA"/>
+                </a:solidFill>
+              </a:defRPr>
+            </a:pPr>
+            <a:r>
+              <a:t>How a single citizen camera click with satellite coordinates automatically isolates the exact contractor &amp; freezes Performance Bank Guarantee (PBG)</a:t>
+            </a:r>
+          </a:p>
+        </p:txBody>
+      </p:sp>
+      <p:sp>
+        <p:nvSpPr>
+          <p:cNvPr id="5" name="Rounded Rectangle 4"/>
+          <p:cNvSpPr/>
+          <p:nvPr/>
+        </p:nvSpPr>
+        <p:spPr>
+          <a:xfrm>
+            <a:off x="640080" y="1280160"/>
+            <a:ext cx="2560320" cy="4114800"/>
+          </a:xfrm>
+          <a:prstGeom prst="roundRect">
+            <a:avLst/>
+          </a:prstGeom>
+          <a:solidFill>
+            <a:srgbClr val="F8FAFC"/>
+          </a:solidFill>
+          <a:ln w="19050">
+            <a:solidFill>
+              <a:srgbClr val="E2E8F0"/>
+            </a:solidFill>
+          </a:ln>
+        </p:spPr>
+        <p:style>
+          <a:lnRef idx="1">
+            <a:schemeClr val="accent1"/>
+          </a:lnRef>
+          <a:fillRef idx="3">
+            <a:schemeClr val="accent1"/>
+          </a:fillRef>
+          <a:effectRef idx="2">
+            <a:schemeClr val="accent1"/>
+          </a:effectRef>
+          <a:fontRef idx="minor">
+            <a:schemeClr val="lt1"/>
+          </a:fontRef>
+        </p:style>
+        <p:txBody>
+          <a:bodyPr rtlCol="0" anchor="ctr"/>
+          <a:lstStyle/>
+          <a:p>
+            <a:pPr algn="ctr"/>
+          </a:p>
+        </p:txBody>
+      </p:sp>
+      <p:sp>
+        <p:nvSpPr>
+          <p:cNvPr id="6" name="Rounded Rectangle 5"/>
+          <p:cNvSpPr/>
+          <p:nvPr/>
+        </p:nvSpPr>
+        <p:spPr>
+          <a:xfrm>
+            <a:off x="640080" y="1280160"/>
+            <a:ext cx="2560320" cy="1005840"/>
+          </a:xfrm>
+          <a:prstGeom prst="roundRect">
+            <a:avLst/>
+          </a:prstGeom>
+          <a:solidFill>
+            <a:srgbClr val="1E3A8A"/>
+          </a:solidFill>
+          <a:ln>
+            <a:solidFill>
+              <a:srgbClr val="1E3A8A"/>
+            </a:solidFill>
+          </a:ln>
+        </p:spPr>
+        <p:style>
+          <a:lnRef idx="1">
+            <a:schemeClr val="accent1"/>
+          </a:lnRef>
+          <a:fillRef idx="3">
+            <a:schemeClr val="accent1"/>
+          </a:fillRef>
+          <a:effectRef idx="2">
+            <a:schemeClr val="accent1"/>
+          </a:effectRef>
+          <a:fontRef idx="minor">
+            <a:schemeClr val="lt1"/>
+          </a:fontRef>
+        </p:style>
+        <p:txBody>
+          <a:bodyPr rtlCol="0" anchor="ctr" wrap="square"/>
+          <a:lstStyle/>
+          <a:p>
+            <a:pPr algn="ctr">
+              <a:defRPr sz="850" b="1">
+                <a:solidFill>
+                  <a:srgbClr val="FED7AA"/>
+                </a:solidFill>
+              </a:defRPr>
+            </a:pPr>
+            <a:r>
+              <a:t>STEP 1: HARDWARE CAPTURE</a:t>
+            </a:r>
+          </a:p>
+          <a:p>
+            <a:pPr>
+              <a:defRPr sz="1200" b="1">
+                <a:solidFill>
+                  <a:srgbClr val="FFFFFF"/>
+                </a:solidFill>
+              </a:defRPr>
+            </a:pPr>
+            <a:r>
+              <a:t>Camera &amp; GPS Geotag HUD</a:t>
+            </a:r>
+          </a:p>
+          <a:p>
+            <a:pPr>
+              <a:defRPr sz="800">
+                <a:solidFill>
+                  <a:srgbClr val="E0E7FF"/>
+                </a:solidFill>
+              </a:defRPr>
+            </a:pPr>
+            <a:r>
+              <a:t>Device Hardware API</a:t>
+            </a:r>
+          </a:p>
+        </p:txBody>
+      </p:sp>
+      <p:sp>
+        <p:nvSpPr>
+          <p:cNvPr id="7" name="TextBox 6"/>
+          <p:cNvSpPr txBox="1"/>
+          <p:nvPr/>
+        </p:nvSpPr>
+        <p:spPr>
+          <a:xfrm>
+            <a:off x="749808" y="2331720"/>
+            <a:ext cx="2340864" cy="3017520"/>
+          </a:xfrm>
+          <a:prstGeom prst="rect">
+            <a:avLst/>
+          </a:prstGeom>
+          <a:noFill/>
+        </p:spPr>
+        <p:txBody>
+          <a:bodyPr wrap="square">
+            <a:spAutoFit/>
+          </a:bodyPr>
+          <a:lstStyle/>
+          <a:p>
+            <a:pPr>
+              <a:spcAft>
+                <a:spcPts val="600"/>
+              </a:spcAft>
+              <a:defRPr sz="900">
+                <a:solidFill>
+                  <a:srgbClr val="0F172A"/>
+                </a:solidFill>
+              </a:defRPr>
+            </a:pPr>
+            <a:r>
+              <a:t>• HTML5 navigator.mediaDevices activates real-time viewfinder on mobile/desktop.</a:t>
+            </a:r>
+          </a:p>
+          <a:p>
+            <a:pPr>
+              <a:spcAft>
+                <a:spcPts val="600"/>
+              </a:spcAft>
+              <a:defRPr sz="900">
+                <a:solidFill>
+                  <a:srgbClr val="0F172A"/>
+                </a:solidFill>
+              </a:defRPr>
+            </a:pPr>
+            <a:r>
+              <a:t>• Simultaneously samples hardware GPS chip (WGS84 datum) with +/-5m accuracy.</a:t>
+            </a:r>
+          </a:p>
+          <a:p>
+            <a:pPr>
+              <a:spcAft>
+                <a:spcPts val="600"/>
+              </a:spcAft>
+              <a:defRPr sz="900">
+                <a:solidFill>
+                  <a:srgbClr val="0F172A"/>
+                </a:solidFill>
+              </a:defRPr>
+            </a:pPr>
+            <a:r>
+              <a:t>• Optical reticle guides citizen to align defect, crack, or collapse inside frame.</a:t>
+            </a:r>
+          </a:p>
+          <a:p>
+            <a:pPr>
+              <a:spcAft>
+                <a:spcPts val="600"/>
+              </a:spcAft>
+              <a:defRPr sz="900">
+                <a:solidFill>
+                  <a:srgbClr val="0F172A"/>
+                </a:solidFill>
+              </a:defRPr>
+            </a:pPr>
+            <a:r>
+              <a:t>• Canvas burns cryptographic timestamp &amp; coordinate watermark directly into image bytes.</a:t>
+            </a:r>
+          </a:p>
+        </p:txBody>
+      </p:sp>
+      <p:sp>
+        <p:nvSpPr>
+          <p:cNvPr id="8" name="Rounded Rectangle 7"/>
+          <p:cNvSpPr/>
+          <p:nvPr/>
+        </p:nvSpPr>
+        <p:spPr>
+          <a:xfrm>
+            <a:off x="3419856" y="1280160"/>
+            <a:ext cx="2560320" cy="4114800"/>
+          </a:xfrm>
+          <a:prstGeom prst="roundRect">
+            <a:avLst/>
+          </a:prstGeom>
+          <a:solidFill>
+            <a:srgbClr val="F8FAFC"/>
+          </a:solidFill>
+          <a:ln w="19050">
+            <a:solidFill>
+              <a:srgbClr val="E2E8F0"/>
+            </a:solidFill>
+          </a:ln>
+        </p:spPr>
+        <p:style>
+          <a:lnRef idx="1">
+            <a:schemeClr val="accent1"/>
+          </a:lnRef>
+          <a:fillRef idx="3">
+            <a:schemeClr val="accent1"/>
+          </a:fillRef>
+          <a:effectRef idx="2">
+            <a:schemeClr val="accent1"/>
+          </a:effectRef>
+          <a:fontRef idx="minor">
+            <a:schemeClr val="lt1"/>
+          </a:fontRef>
+        </p:style>
+        <p:txBody>
+          <a:bodyPr rtlCol="0" anchor="ctr"/>
+          <a:lstStyle/>
+          <a:p>
+            <a:pPr algn="ctr"/>
+          </a:p>
+        </p:txBody>
+      </p:sp>
+      <p:sp>
+        <p:nvSpPr>
+          <p:cNvPr id="9" name="Rounded Rectangle 8"/>
+          <p:cNvSpPr/>
+          <p:nvPr/>
+        </p:nvSpPr>
+        <p:spPr>
+          <a:xfrm>
+            <a:off x="3419856" y="1280160"/>
+            <a:ext cx="2560320" cy="1005840"/>
+          </a:xfrm>
+          <a:prstGeom prst="roundRect">
+            <a:avLst/>
+          </a:prstGeom>
+          <a:solidFill>
+            <a:srgbClr val="0369A1"/>
+          </a:solidFill>
+          <a:ln>
+            <a:solidFill>
+              <a:srgbClr val="0369A1"/>
+            </a:solidFill>
+          </a:ln>
+        </p:spPr>
+        <p:style>
+          <a:lnRef idx="1">
+            <a:schemeClr val="accent1"/>
+          </a:lnRef>
+          <a:fillRef idx="3">
+            <a:schemeClr val="accent1"/>
+          </a:fillRef>
+          <a:effectRef idx="2">
+            <a:schemeClr val="accent1"/>
+          </a:effectRef>
+          <a:fontRef idx="minor">
+            <a:schemeClr val="lt1"/>
+          </a:fontRef>
+        </p:style>
+        <p:txBody>
+          <a:bodyPr rtlCol="0" anchor="ctr" wrap="square"/>
+          <a:lstStyle/>
+          <a:p>
+            <a:pPr algn="ctr">
+              <a:defRPr sz="850" b="1">
+                <a:solidFill>
+                  <a:srgbClr val="FED7AA"/>
+                </a:solidFill>
+              </a:defRPr>
+            </a:pPr>
+            <a:r>
+              <a:t>STEP 2: SPATIAL MATCHING</a:t>
+            </a:r>
+          </a:p>
+          <a:p>
+            <a:pPr>
+              <a:defRPr sz="1200" b="1">
+                <a:solidFill>
+                  <a:srgbClr val="FFFFFF"/>
+                </a:solidFill>
+              </a:defRPr>
+            </a:pPr>
+            <a:r>
+              <a:t>Haversine Geofence Engine</a:t>
+            </a:r>
+          </a:p>
+          <a:p>
+            <a:pPr>
+              <a:defRPr sz="800">
+                <a:solidFill>
+                  <a:srgbClr val="E0E7FF"/>
+                </a:solidFill>
+              </a:defRPr>
+            </a:pPr>
+            <a:r>
+              <a:t>Spherical Geodesy Alg</a:t>
+            </a:r>
+          </a:p>
+        </p:txBody>
+      </p:sp>
+      <p:sp>
+        <p:nvSpPr>
+          <p:cNvPr id="10" name="TextBox 9"/>
+          <p:cNvSpPr txBox="1"/>
+          <p:nvPr/>
+        </p:nvSpPr>
+        <p:spPr>
+          <a:xfrm>
+            <a:off x="3529584" y="2331720"/>
+            <a:ext cx="2340864" cy="3017520"/>
+          </a:xfrm>
+          <a:prstGeom prst="rect">
+            <a:avLst/>
+          </a:prstGeom>
+          <a:noFill/>
+        </p:spPr>
+        <p:txBody>
+          <a:bodyPr wrap="square">
+            <a:spAutoFit/>
+          </a:bodyPr>
+          <a:lstStyle/>
+          <a:p>
+            <a:pPr>
+              <a:spcAft>
+                <a:spcPts val="600"/>
+              </a:spcAft>
+              <a:defRPr sz="900">
+                <a:solidFill>
+                  <a:srgbClr val="0F172A"/>
+                </a:solidFill>
+              </a:defRPr>
+            </a:pPr>
+            <a:r>
+              <a:t>• Calculates great-circle distance: d = 2R * arcsin(sqrt(sin^2(dlat/2) + ...)).</a:t>
+            </a:r>
+          </a:p>
+          <a:p>
+            <a:pPr>
+              <a:spcAft>
+                <a:spcPts val="600"/>
+              </a:spcAft>
+              <a:defRPr sz="900">
+                <a:solidFill>
+                  <a:srgbClr val="0F172A"/>
+                </a:solidFill>
+              </a:defRPr>
+            </a:pPr>
+            <a:r>
+              <a:t>• Queries central MPLADS master registry within 200m to 3km perimeter.</a:t>
+            </a:r>
+          </a:p>
+          <a:p>
+            <a:pPr>
+              <a:spcAft>
+                <a:spcPts val="600"/>
+              </a:spcAft>
+              <a:defRPr sz="900">
+                <a:solidFill>
+                  <a:srgbClr val="0F172A"/>
+                </a:solidFill>
+              </a:defRPr>
+            </a:pPr>
+            <a:r>
+              <a:t>• Multi-Project Disambiguation: If multiple works share a junction, sorts by proximity, active DLP period, and visual category match.</a:t>
+            </a:r>
+          </a:p>
+          <a:p>
+            <a:pPr>
+              <a:spcAft>
+                <a:spcPts val="600"/>
+              </a:spcAft>
+              <a:defRPr sz="900">
+                <a:solidFill>
+                  <a:srgbClr val="0F172A"/>
+                </a:solidFill>
+              </a:defRPr>
+            </a:pPr>
+            <a:r>
+              <a:t>• Identifies target Project ID, title, and exact sanction ledger instantly.</a:t>
+            </a:r>
+          </a:p>
+        </p:txBody>
+      </p:sp>
+      <p:sp>
+        <p:nvSpPr>
+          <p:cNvPr id="11" name="Rounded Rectangle 10"/>
+          <p:cNvSpPr/>
+          <p:nvPr/>
+        </p:nvSpPr>
+        <p:spPr>
+          <a:xfrm>
+            <a:off x="6199632" y="1280160"/>
+            <a:ext cx="2560320" cy="4114800"/>
+          </a:xfrm>
+          <a:prstGeom prst="roundRect">
+            <a:avLst/>
+          </a:prstGeom>
+          <a:solidFill>
+            <a:srgbClr val="F8FAFC"/>
+          </a:solidFill>
+          <a:ln w="19050">
+            <a:solidFill>
+              <a:srgbClr val="E2E8F0"/>
+            </a:solidFill>
+          </a:ln>
+        </p:spPr>
+        <p:style>
+          <a:lnRef idx="1">
+            <a:schemeClr val="accent1"/>
+          </a:lnRef>
+          <a:fillRef idx="3">
+            <a:schemeClr val="accent1"/>
+          </a:fillRef>
+          <a:effectRef idx="2">
+            <a:schemeClr val="accent1"/>
+          </a:effectRef>
+          <a:fontRef idx="minor">
+            <a:schemeClr val="lt1"/>
+          </a:fontRef>
+        </p:style>
+        <p:txBody>
+          <a:bodyPr rtlCol="0" anchor="ctr"/>
+          <a:lstStyle/>
+          <a:p>
+            <a:pPr algn="ctr"/>
+          </a:p>
+        </p:txBody>
+      </p:sp>
+      <p:sp>
+        <p:nvSpPr>
+          <p:cNvPr id="12" name="Rounded Rectangle 11"/>
+          <p:cNvSpPr/>
+          <p:nvPr/>
+        </p:nvSpPr>
+        <p:spPr>
+          <a:xfrm>
+            <a:off x="6199632" y="1280160"/>
+            <a:ext cx="2560320" cy="1005840"/>
+          </a:xfrm>
+          <a:prstGeom prst="roundRect">
+            <a:avLst/>
+          </a:prstGeom>
+          <a:solidFill>
+            <a:srgbClr val="B45309"/>
+          </a:solidFill>
+          <a:ln>
+            <a:solidFill>
+              <a:srgbClr val="B45309"/>
+            </a:solidFill>
+          </a:ln>
+        </p:spPr>
+        <p:style>
+          <a:lnRef idx="1">
+            <a:schemeClr val="accent1"/>
+          </a:lnRef>
+          <a:fillRef idx="3">
+            <a:schemeClr val="accent1"/>
+          </a:fillRef>
+          <a:effectRef idx="2">
+            <a:schemeClr val="accent1"/>
+          </a:effectRef>
+          <a:fontRef idx="minor">
+            <a:schemeClr val="lt1"/>
+          </a:fontRef>
+        </p:style>
+        <p:txBody>
+          <a:bodyPr rtlCol="0" anchor="ctr" wrap="square"/>
+          <a:lstStyle/>
+          <a:p>
+            <a:pPr algn="ctr">
+              <a:defRPr sz="850" b="1">
+                <a:solidFill>
+                  <a:srgbClr val="FED7AA"/>
+                </a:solidFill>
+              </a:defRPr>
+            </a:pPr>
+            <a:r>
+              <a:t>STEP 3: LEGAL RESOLUTION</a:t>
+            </a:r>
+          </a:p>
+          <a:p>
+            <a:pPr>
+              <a:defRPr sz="1200" b="1">
+                <a:solidFill>
+                  <a:srgbClr val="FFFFFF"/>
+                </a:solidFill>
+              </a:defRPr>
+            </a:pPr>
+            <a:r>
+              <a:t>Contractor &amp; PBG Resolution</a:t>
+            </a:r>
+          </a:p>
+          <a:p>
+            <a:pPr>
+              <a:defRPr sz="800">
+                <a:solidFill>
+                  <a:srgbClr val="E0E7FF"/>
+                </a:solidFill>
+              </a:defRPr>
+            </a:pPr>
+            <a:r>
+              <a:t>CPWD Clause 4.2</a:t>
+            </a:r>
+          </a:p>
+        </p:txBody>
+      </p:sp>
+      <p:sp>
+        <p:nvSpPr>
+          <p:cNvPr id="13" name="TextBox 12"/>
+          <p:cNvSpPr txBox="1"/>
+          <p:nvPr/>
+        </p:nvSpPr>
+        <p:spPr>
+          <a:xfrm>
+            <a:off x="6309360" y="2331720"/>
+            <a:ext cx="2340864" cy="3017520"/>
+          </a:xfrm>
+          <a:prstGeom prst="rect">
+            <a:avLst/>
+          </a:prstGeom>
+          <a:noFill/>
+        </p:spPr>
+        <p:txBody>
+          <a:bodyPr wrap="square">
+            <a:spAutoFit/>
+          </a:bodyPr>
+          <a:lstStyle/>
+          <a:p>
+            <a:pPr>
+              <a:spcAft>
+                <a:spcPts val="600"/>
+              </a:spcAft>
+              <a:defRPr sz="900">
+                <a:solidFill>
+                  <a:srgbClr val="0F172A"/>
+                </a:solidFill>
+              </a:defRPr>
+            </a:pPr>
+            <a:r>
+              <a:t>• Extracts executing contractor profile and unique registry ID (e.g. CON-AP-042).</a:t>
+            </a:r>
+          </a:p>
+          <a:p>
+            <a:pPr>
+              <a:spcAft>
+                <a:spcPts val="600"/>
+              </a:spcAft>
+              <a:defRPr sz="900">
+                <a:solidFill>
+                  <a:srgbClr val="0F172A"/>
+                </a:solidFill>
+              </a:defRPr>
+            </a:pPr>
+            <a:r>
+              <a:t>• Queries active 36-Month Defect Liability Period (DLP) statutory guarantee.</a:t>
+            </a:r>
+          </a:p>
+          <a:p>
+            <a:pPr>
+              <a:spcAft>
+                <a:spcPts val="600"/>
+              </a:spcAft>
+              <a:defRPr sz="900">
+                <a:solidFill>
+                  <a:srgbClr val="0F172A"/>
+                </a:solidFill>
+              </a:defRPr>
+            </a:pPr>
+            <a:r>
+              <a:t>• Computes 5% Performance Bank Guarantee (PBG) in treasury escrow (e.g. Rs. 1,44,000).</a:t>
+            </a:r>
+          </a:p>
+          <a:p>
+            <a:pPr>
+              <a:spcAft>
+                <a:spcPts val="600"/>
+              </a:spcAft>
+              <a:defRPr sz="900">
+                <a:solidFill>
+                  <a:srgbClr val="0F172A"/>
+                </a:solidFill>
+              </a:defRPr>
+            </a:pPr>
+            <a:r>
+              <a:t>• Tags guarantee record: action_required = True and logs defect docket reference.</a:t>
+            </a:r>
+          </a:p>
+        </p:txBody>
+      </p:sp>
+      <p:sp>
+        <p:nvSpPr>
+          <p:cNvPr id="14" name="Rounded Rectangle 13"/>
+          <p:cNvSpPr/>
+          <p:nvPr/>
+        </p:nvSpPr>
+        <p:spPr>
+          <a:xfrm>
+            <a:off x="8979408" y="1280160"/>
+            <a:ext cx="2560320" cy="4114800"/>
+          </a:xfrm>
+          <a:prstGeom prst="roundRect">
+            <a:avLst/>
+          </a:prstGeom>
+          <a:solidFill>
+            <a:srgbClr val="F8FAFC"/>
+          </a:solidFill>
+          <a:ln w="19050">
+            <a:solidFill>
+              <a:srgbClr val="E2E8F0"/>
+            </a:solidFill>
+          </a:ln>
+        </p:spPr>
+        <p:style>
+          <a:lnRef idx="1">
+            <a:schemeClr val="accent1"/>
+          </a:lnRef>
+          <a:fillRef idx="3">
+            <a:schemeClr val="accent1"/>
+          </a:fillRef>
+          <a:effectRef idx="2">
+            <a:schemeClr val="accent1"/>
+          </a:effectRef>
+          <a:fontRef idx="minor">
+            <a:schemeClr val="lt1"/>
+          </a:fontRef>
+        </p:style>
+        <p:txBody>
+          <a:bodyPr rtlCol="0" anchor="ctr"/>
+          <a:lstStyle/>
+          <a:p>
+            <a:pPr algn="ctr"/>
+          </a:p>
+        </p:txBody>
+      </p:sp>
+      <p:sp>
+        <p:nvSpPr>
+          <p:cNvPr id="15" name="Rounded Rectangle 14"/>
+          <p:cNvSpPr/>
+          <p:nvPr/>
+        </p:nvSpPr>
+        <p:spPr>
+          <a:xfrm>
+            <a:off x="8979408" y="1280160"/>
+            <a:ext cx="2560320" cy="1005840"/>
+          </a:xfrm>
+          <a:prstGeom prst="roundRect">
+            <a:avLst/>
+          </a:prstGeom>
+          <a:solidFill>
+            <a:srgbClr val="B91C1C"/>
+          </a:solidFill>
+          <a:ln>
+            <a:solidFill>
+              <a:srgbClr val="B91C1C"/>
+            </a:solidFill>
+          </a:ln>
+        </p:spPr>
+        <p:style>
+          <a:lnRef idx="1">
+            <a:schemeClr val="accent1"/>
+          </a:lnRef>
+          <a:fillRef idx="3">
+            <a:schemeClr val="accent1"/>
+          </a:fillRef>
+          <a:effectRef idx="2">
+            <a:schemeClr val="accent1"/>
+          </a:effectRef>
+          <a:fontRef idx="minor">
+            <a:schemeClr val="lt1"/>
+          </a:fontRef>
+        </p:style>
+        <p:txBody>
+          <a:bodyPr rtlCol="0" anchor="ctr" wrap="square"/>
+          <a:lstStyle/>
+          <a:p>
+            <a:pPr algn="ctr">
+              <a:defRPr sz="850" b="1">
+                <a:solidFill>
+                  <a:srgbClr val="FED7AA"/>
+                </a:solidFill>
+              </a:defRPr>
+            </a:pPr>
+            <a:r>
+              <a:t>STEP 4: AUTO ESCALATION</a:t>
+            </a:r>
+          </a:p>
+          <a:p>
+            <a:pPr>
+              <a:defRPr sz="1200" b="1">
+                <a:solidFill>
+                  <a:srgbClr val="FFFFFF"/>
+                </a:solidFill>
+              </a:defRPr>
+            </a:pPr>
+            <a:r>
+              <a:t>Level-4 Vigilance Trigger</a:t>
+            </a:r>
+          </a:p>
+          <a:p>
+            <a:pPr>
+              <a:defRPr sz="800">
+                <a:solidFill>
+                  <a:srgbClr val="E0E7FF"/>
+                </a:solidFill>
+              </a:defRPr>
+            </a:pPr>
+            <a:r>
+              <a:t>Autonomous Circuit-Breaker</a:t>
+            </a:r>
+          </a:p>
+        </p:txBody>
+      </p:sp>
+      <p:sp>
+        <p:nvSpPr>
+          <p:cNvPr id="16" name="TextBox 15"/>
+          <p:cNvSpPr txBox="1"/>
+          <p:nvPr/>
+        </p:nvSpPr>
+        <p:spPr>
+          <a:xfrm>
+            <a:off x="9089136" y="2331720"/>
+            <a:ext cx="2340864" cy="3017520"/>
+          </a:xfrm>
+          <a:prstGeom prst="rect">
+            <a:avLst/>
+          </a:prstGeom>
+          <a:noFill/>
+        </p:spPr>
+        <p:txBody>
+          <a:bodyPr wrap="square">
+            <a:spAutoFit/>
+          </a:bodyPr>
+          <a:lstStyle/>
+          <a:p>
+            <a:pPr>
+              <a:spcAft>
+                <a:spcPts val="600"/>
+              </a:spcAft>
+              <a:defRPr sz="900">
+                <a:solidFill>
+                  <a:srgbClr val="0F172A"/>
+                </a:solidFill>
+              </a:defRPr>
+            </a:pPr>
+            <a:r>
+              <a:t>• Auto-generates CRITICAL Alert (ALT-DEFECT-XXXXX) in surveillance engine.</a:t>
+            </a:r>
+          </a:p>
+          <a:p>
+            <a:pPr>
+              <a:spcAft>
+                <a:spcPts val="600"/>
+              </a:spcAft>
+              <a:defRPr sz="900">
+                <a:solidFill>
+                  <a:srgbClr val="0F172A"/>
+                </a:solidFill>
+              </a:defRPr>
+            </a:pPr>
+            <a:r>
+              <a:t>• Directly routed to District Collector, Superintending Engineer &amp; Chief Vigilance Officer.</a:t>
+            </a:r>
+          </a:p>
+          <a:p>
+            <a:pPr>
+              <a:spcAft>
+                <a:spcPts val="600"/>
+              </a:spcAft>
+              <a:defRPr sz="900">
+                <a:solidFill>
+                  <a:srgbClr val="0F172A"/>
+                </a:solidFill>
+              </a:defRPr>
+            </a:pPr>
+            <a:r>
+              <a:t>• Triggers 3-day statutory show-cause notice to contractor before PBG forfeiture.</a:t>
+            </a:r>
+          </a:p>
+          <a:p>
+            <a:pPr>
+              <a:spcAft>
+                <a:spcPts val="600"/>
+              </a:spcAft>
+              <a:defRPr sz="900">
+                <a:solidFill>
+                  <a:srgbClr val="0F172A"/>
+                </a:solidFill>
+              </a:defRPr>
+            </a:pPr>
+            <a:r>
+              <a:t>• Citizen &amp; officials can trace real-time 4-step progress via Live Tracking Console.</a:t>
+            </a:r>
+          </a:p>
+        </p:txBody>
+      </p:sp>
+      <p:sp>
+        <p:nvSpPr>
+          <p:cNvPr id="17" name="Rounded Rectangle 16"/>
+          <p:cNvSpPr/>
+          <p:nvPr/>
+        </p:nvSpPr>
+        <p:spPr>
+          <a:xfrm>
+            <a:off x="640080" y="5532120"/>
+            <a:ext cx="10911535" cy="1051560"/>
+          </a:xfrm>
+          <a:prstGeom prst="roundRect">
+            <a:avLst/>
+          </a:prstGeom>
+          <a:solidFill>
+            <a:srgbClr val="EEF2FF"/>
+          </a:solidFill>
+          <a:ln>
+            <a:solidFill>
+              <a:srgbClr val="C7D2FE"/>
+            </a:solidFill>
+          </a:ln>
+        </p:spPr>
+        <p:style>
+          <a:lnRef idx="1">
+            <a:schemeClr val="accent1"/>
+          </a:lnRef>
+          <a:fillRef idx="3">
+            <a:schemeClr val="accent1"/>
+          </a:fillRef>
+          <a:effectRef idx="2">
+            <a:schemeClr val="accent1"/>
+          </a:effectRef>
+          <a:fontRef idx="minor">
+            <a:schemeClr val="lt1"/>
+          </a:fontRef>
+        </p:style>
+        <p:txBody>
+          <a:bodyPr rtlCol="0" anchor="ctr" wrap="square"/>
+          <a:lstStyle/>
+          <a:p>
+            <a:pPr algn="ctr">
+              <a:defRPr sz="1000" b="1">
+                <a:solidFill>
+                  <a:srgbClr val="0B2545"/>
+                </a:solidFill>
+              </a:defRPr>
+            </a:pPr>
+            <a:r>
+              <a:t>THE MATHEMATICAL &amp; STATUTORY FORMULA INVOLVED:</a:t>
+            </a:r>
+          </a:p>
+          <a:p>
+            <a:pPr>
+              <a:spcBef>
+                <a:spcPts val="300"/>
+              </a:spcBef>
+              <a:defRPr sz="850">
+                <a:solidFill>
+                  <a:srgbClr val="0F172A"/>
+                </a:solidFill>
+              </a:defRPr>
+            </a:pPr>
+            <a:r>
+              <a:t>1. Haversine Spatial Geodesy: d = 2R * atan2(sqrt(a), sqrt(1-a)) where a = sin^2(dLat/2) + cos(Lat1)*cos(Lat2)*sin^2(dLon/2) | Earth Radius R = 6,371,000 m.</a:t>
+            </a:r>
+            <a:br/>
+            <a:r>
+              <a:t>2. Disambiguation Rank Score: S = (0.50 * ProximityScore) + (0.35 * GuaranteeActiveFlag) + (0.15 * CategoryCosineSimilarity).</a:t>
+            </a:r>
+            <a:br/>
+            <a:r>
+              <a:t>3. Statutory Defect Liability: Invoked under CPWD Works Manual 2024 &amp; MoSPI MPLADS Clause 4.2; 5% Performance Bank Guarantee automatically held in escrow.</a:t>
             </a:r>
           </a:p>
         </p:txBody>
